--- a/docs/MTECH AAI COHORT-1_Human_ID_HAR_Dissertation_Project– Presentation_Phase_2_V1.0.pptx
+++ b/docs/MTECH AAI COHORT-1_Human_ID_HAR_Dissertation_Project– Presentation_Phase_2_V1.0.pptx
@@ -17,6 +17,7 @@
     <p:sldId id="263" r:id="rId11"/>
     <p:sldId id="264" r:id="rId12"/>
     <p:sldId id="265" r:id="rId13"/>
+    <p:sldId id="286" r:id="rId14"/>
   </p:sldIdLst>
   <p:sldSz cx="9144000" cy="6858000" type="screen4x3"/>
   <p:notesSz cx="6858000" cy="9144000"/>
@@ -313,7 +314,7 @@
           <a:p>
             <a:fld id="{5BCAD085-E8A6-8845-BD4E-CB4CCA059FC4}" type="datetimeFigureOut">
               <a:rPr lang="en-US" smtClean="0"/>
-              <a:t>9/13/2025</a:t>
+              <a:t>10/2/25</a:t>
             </a:fld>
             <a:endParaRPr lang="en-US"/>
           </a:p>
@@ -481,7 +482,7 @@
           <a:p>
             <a:fld id="{5BCAD085-E8A6-8845-BD4E-CB4CCA059FC4}" type="datetimeFigureOut">
               <a:rPr lang="en-US" smtClean="0"/>
-              <a:t>9/13/2025</a:t>
+              <a:t>10/2/25</a:t>
             </a:fld>
             <a:endParaRPr lang="en-US"/>
           </a:p>
@@ -659,7 +660,7 @@
           <a:p>
             <a:fld id="{5BCAD085-E8A6-8845-BD4E-CB4CCA059FC4}" type="datetimeFigureOut">
               <a:rPr lang="en-US" smtClean="0"/>
-              <a:t>9/13/2025</a:t>
+              <a:t>10/2/25</a:t>
             </a:fld>
             <a:endParaRPr lang="en-US"/>
           </a:p>
@@ -827,7 +828,7 @@
           <a:p>
             <a:fld id="{5BCAD085-E8A6-8845-BD4E-CB4CCA059FC4}" type="datetimeFigureOut">
               <a:rPr lang="en-US" smtClean="0"/>
-              <a:t>9/13/2025</a:t>
+              <a:t>10/2/25</a:t>
             </a:fld>
             <a:endParaRPr lang="en-US"/>
           </a:p>
@@ -1072,7 +1073,7 @@
           <a:p>
             <a:fld id="{5BCAD085-E8A6-8845-BD4E-CB4CCA059FC4}" type="datetimeFigureOut">
               <a:rPr lang="en-US" smtClean="0"/>
-              <a:t>9/13/2025</a:t>
+              <a:t>10/2/25</a:t>
             </a:fld>
             <a:endParaRPr lang="en-US"/>
           </a:p>
@@ -1357,7 +1358,7 @@
           <a:p>
             <a:fld id="{5BCAD085-E8A6-8845-BD4E-CB4CCA059FC4}" type="datetimeFigureOut">
               <a:rPr lang="en-US" smtClean="0"/>
-              <a:t>9/13/2025</a:t>
+              <a:t>10/2/25</a:t>
             </a:fld>
             <a:endParaRPr lang="en-US"/>
           </a:p>
@@ -1776,7 +1777,7 @@
           <a:p>
             <a:fld id="{5BCAD085-E8A6-8845-BD4E-CB4CCA059FC4}" type="datetimeFigureOut">
               <a:rPr lang="en-US" smtClean="0"/>
-              <a:t>9/13/2025</a:t>
+              <a:t>10/2/25</a:t>
             </a:fld>
             <a:endParaRPr lang="en-US"/>
           </a:p>
@@ -1893,7 +1894,7 @@
           <a:p>
             <a:fld id="{5BCAD085-E8A6-8845-BD4E-CB4CCA059FC4}" type="datetimeFigureOut">
               <a:rPr lang="en-US" smtClean="0"/>
-              <a:t>9/13/2025</a:t>
+              <a:t>10/2/25</a:t>
             </a:fld>
             <a:endParaRPr lang="en-US"/>
           </a:p>
@@ -1988,7 +1989,7 @@
           <a:p>
             <a:fld id="{5BCAD085-E8A6-8845-BD4E-CB4CCA059FC4}" type="datetimeFigureOut">
               <a:rPr lang="en-US" smtClean="0"/>
-              <a:t>9/13/2025</a:t>
+              <a:t>10/2/25</a:t>
             </a:fld>
             <a:endParaRPr lang="en-US"/>
           </a:p>
@@ -2263,7 +2264,7 @@
           <a:p>
             <a:fld id="{5BCAD085-E8A6-8845-BD4E-CB4CCA059FC4}" type="datetimeFigureOut">
               <a:rPr lang="en-US" smtClean="0"/>
-              <a:t>9/13/2025</a:t>
+              <a:t>10/2/25</a:t>
             </a:fld>
             <a:endParaRPr lang="en-US"/>
           </a:p>
@@ -2515,7 +2516,7 @@
           <a:p>
             <a:fld id="{5BCAD085-E8A6-8845-BD4E-CB4CCA059FC4}" type="datetimeFigureOut">
               <a:rPr lang="en-US" smtClean="0"/>
-              <a:t>9/13/2025</a:t>
+              <a:t>10/2/25</a:t>
             </a:fld>
             <a:endParaRPr lang="en-US"/>
           </a:p>
@@ -2726,7 +2727,7 @@
           <a:p>
             <a:fld id="{5BCAD085-E8A6-8845-BD4E-CB4CCA059FC4}" type="datetimeFigureOut">
               <a:rPr lang="en-US" smtClean="0"/>
-              <a:t>9/13/2025</a:t>
+              <a:t>10/2/25</a:t>
             </a:fld>
             <a:endParaRPr lang="en-US"/>
           </a:p>
@@ -3915,6 +3916,244 @@
 </p:sld>
 </file>
 
+<file path=ppt/slides/slide13.xml><?xml version="1.0" encoding="utf-8"?>
+<p:sld xmlns:a="http://schemas.openxmlformats.org/drawingml/2006/main" xmlns:r="http://schemas.openxmlformats.org/officeDocument/2006/relationships" xmlns:p="http://schemas.openxmlformats.org/presentationml/2006/main">
+  <p:cSld>
+    <p:spTree>
+      <p:nvGrpSpPr>
+        <p:cNvPr id="1" name=""/>
+        <p:cNvGrpSpPr/>
+        <p:nvPr/>
+      </p:nvGrpSpPr>
+      <p:grpSpPr>
+        <a:xfrm>
+          <a:off x="0" y="0"/>
+          <a:ext cx="0" cy="0"/>
+          <a:chOff x="0" y="0"/>
+          <a:chExt cx="0" cy="0"/>
+        </a:xfrm>
+      </p:grpSpPr>
+      <p:sp>
+        <p:nvSpPr>
+          <p:cNvPr id="2" name="Title 1">
+            <a:extLst>
+              <a:ext uri="{FF2B5EF4-FFF2-40B4-BE49-F238E27FC236}">
+                <a16:creationId xmlns:a16="http://schemas.microsoft.com/office/drawing/2014/main" id="{2EAAA500-3DC2-4DDD-FE6D-2C01EB57E487}"/>
+              </a:ext>
+            </a:extLst>
+          </p:cNvPr>
+          <p:cNvSpPr>
+            <a:spLocks noGrp="1"/>
+          </p:cNvSpPr>
+          <p:nvPr>
+            <p:ph type="title"/>
+          </p:nvPr>
+        </p:nvSpPr>
+        <p:spPr/>
+        <p:txBody>
+          <a:bodyPr/>
+          <a:lstStyle/>
+          <a:p>
+            <a:endParaRPr lang="en-US"/>
+          </a:p>
+        </p:txBody>
+      </p:sp>
+      <p:sp>
+        <p:nvSpPr>
+          <p:cNvPr id="3" name="Content Placeholder 2">
+            <a:extLst>
+              <a:ext uri="{FF2B5EF4-FFF2-40B4-BE49-F238E27FC236}">
+                <a16:creationId xmlns:a16="http://schemas.microsoft.com/office/drawing/2014/main" id="{52D6B91E-58FB-2FEE-2253-B5F72C03F2BA}"/>
+              </a:ext>
+            </a:extLst>
+          </p:cNvPr>
+          <p:cNvSpPr>
+            <a:spLocks noGrp="1"/>
+          </p:cNvSpPr>
+          <p:nvPr>
+            <p:ph idx="1"/>
+          </p:nvPr>
+        </p:nvSpPr>
+        <p:spPr/>
+        <p:txBody>
+          <a:bodyPr>
+            <a:normAutofit fontScale="70000" lnSpcReduction="20000"/>
+          </a:bodyPr>
+          <a:lstStyle/>
+          <a:p>
+            <a:r>
+              <a:rPr lang="en-IN" dirty="0"/>
+              <a:t>Loss function is set as cross entropy, suitable for multi-class classification.</a:t>
+            </a:r>
+          </a:p>
+          <a:p>
+            <a:r>
+              <a:rPr lang="en-IN" dirty="0"/>
+              <a:t>Adam optimizer for efficient adaptive gradient-based optimization.</a:t>
+            </a:r>
+          </a:p>
+          <a:p>
+            <a:pPr lvl="2"/>
+            <a:r>
+              <a:rPr lang="en-IN" dirty="0" err="1">
+                <a:highlight>
+                  <a:srgbClr val="FFFF00"/>
+                </a:highlight>
+              </a:rPr>
+              <a:t>optimizer.zero_grad</a:t>
+            </a:r>
+            <a:r>
+              <a:rPr lang="en-IN" dirty="0">
+                <a:highlight>
+                  <a:srgbClr val="FFFF00"/>
+                </a:highlight>
+              </a:rPr>
+              <a:t>() </a:t>
+            </a:r>
+          </a:p>
+          <a:p>
+            <a:pPr lvl="2"/>
+            <a:r>
+              <a:rPr lang="en-IN" dirty="0">
+                <a:highlight>
+                  <a:srgbClr val="FFFF00"/>
+                </a:highlight>
+              </a:rPr>
+              <a:t>outputs = model(</a:t>
+            </a:r>
+            <a:r>
+              <a:rPr lang="en-IN" dirty="0" err="1">
+                <a:highlight>
+                  <a:srgbClr val="FFFF00"/>
+                </a:highlight>
+              </a:rPr>
+              <a:t>csi_seq</a:t>
+            </a:r>
+            <a:r>
+              <a:rPr lang="en-IN" dirty="0">
+                <a:highlight>
+                  <a:srgbClr val="FFFF00"/>
+                </a:highlight>
+              </a:rPr>
+              <a:t>, </a:t>
+            </a:r>
+            <a:r>
+              <a:rPr lang="en-IN" dirty="0" err="1">
+                <a:highlight>
+                  <a:srgbClr val="FFFF00"/>
+                </a:highlight>
+              </a:rPr>
+              <a:t>meta_seq</a:t>
+            </a:r>
+            <a:r>
+              <a:rPr lang="en-IN" dirty="0">
+                <a:highlight>
+                  <a:srgbClr val="FFFF00"/>
+                </a:highlight>
+              </a:rPr>
+              <a:t>) </a:t>
+            </a:r>
+          </a:p>
+          <a:p>
+            <a:pPr lvl="2"/>
+            <a:r>
+              <a:rPr lang="en-IN" dirty="0">
+                <a:highlight>
+                  <a:srgbClr val="FFFF00"/>
+                </a:highlight>
+              </a:rPr>
+              <a:t>loss = criterion(outputs, labels) </a:t>
+            </a:r>
+          </a:p>
+          <a:p>
+            <a:pPr lvl="2"/>
+            <a:r>
+              <a:rPr lang="en-IN" dirty="0" err="1">
+                <a:highlight>
+                  <a:srgbClr val="FFFF00"/>
+                </a:highlight>
+              </a:rPr>
+              <a:t>loss.backward</a:t>
+            </a:r>
+            <a:r>
+              <a:rPr lang="en-IN" dirty="0">
+                <a:highlight>
+                  <a:srgbClr val="FFFF00"/>
+                </a:highlight>
+              </a:rPr>
+              <a:t>() </a:t>
+            </a:r>
+          </a:p>
+          <a:p>
+            <a:pPr lvl="2"/>
+            <a:r>
+              <a:rPr lang="en-IN" dirty="0" err="1">
+                <a:highlight>
+                  <a:srgbClr val="FFFF00"/>
+                </a:highlight>
+              </a:rPr>
+              <a:t>optimizer.step</a:t>
+            </a:r>
+            <a:r>
+              <a:rPr lang="en-IN" dirty="0">
+                <a:highlight>
+                  <a:srgbClr val="FFFF00"/>
+                </a:highlight>
+              </a:rPr>
+              <a:t>() </a:t>
+            </a:r>
+          </a:p>
+          <a:p>
+            <a:r>
+              <a:rPr lang="en-IN" dirty="0"/>
+              <a:t>Zero previous gradients to avoid accumulation.</a:t>
+            </a:r>
+          </a:p>
+          <a:p>
+            <a:r>
+              <a:rPr lang="en-IN" dirty="0"/>
+              <a:t>Forward pass to get outputs.</a:t>
+            </a:r>
+          </a:p>
+          <a:p>
+            <a:r>
+              <a:rPr lang="en-IN" dirty="0"/>
+              <a:t>Compute cross-entropy loss.</a:t>
+            </a:r>
+          </a:p>
+          <a:p>
+            <a:r>
+              <a:rPr lang="en-IN" dirty="0"/>
+              <a:t>Backpropagate loss gradients.</a:t>
+            </a:r>
+          </a:p>
+          <a:p>
+            <a:r>
+              <a:rPr lang="en-IN" dirty="0"/>
+              <a:t>Step optimizer to update weights.</a:t>
+            </a:r>
+          </a:p>
+          <a:p>
+            <a:pPr marL="0" indent="0">
+              <a:buNone/>
+            </a:pPr>
+            <a:endParaRPr lang="en-US" dirty="0"/>
+          </a:p>
+        </p:txBody>
+      </p:sp>
+    </p:spTree>
+    <p:extLst>
+      <p:ext uri="{BB962C8B-B14F-4D97-AF65-F5344CB8AC3E}">
+        <p14:creationId xmlns:p14="http://schemas.microsoft.com/office/powerpoint/2010/main" val="3130295696"/>
+      </p:ext>
+    </p:extLst>
+  </p:cSld>
+  <p:clrMapOvr>
+    <a:masterClrMapping/>
+  </p:clrMapOvr>
+</p:sld>
+</file>
+
 <file path=ppt/slides/slide2.xml><?xml version="1.0" encoding="utf-8"?>
 <p:sld xmlns:a="http://schemas.openxmlformats.org/drawingml/2006/main" xmlns:r="http://schemas.openxmlformats.org/officeDocument/2006/relationships" xmlns:p="http://schemas.openxmlformats.org/presentationml/2006/main">
   <p:cSld>
@@ -4635,25 +4874,29 @@
           </a:bodyPr>
           <a:lstStyle/>
           <a:p>
-            <a:endParaRPr/>
-          </a:p>
-          <a:p>
-            <a:r>
+            <a:endParaRPr dirty="0"/>
+          </a:p>
+          <a:p>
+            <a:r>
+              <a:rPr dirty="0"/>
               <a:t>Subject ID explicitly labeled in filenames (S1–S30).</a:t>
             </a:r>
           </a:p>
           <a:p>
             <a:r>
+              <a:rPr dirty="0"/>
               <a:t>Biometric info (age, weight, height) subtly affects signals.</a:t>
             </a:r>
           </a:p>
           <a:p>
             <a:r>
+              <a:rPr dirty="0"/>
               <a:t>CSI &amp; RSSI are sensitive to individual movement signatures.</a:t>
             </a:r>
           </a:p>
           <a:p>
             <a:r>
+              <a:rPr dirty="0"/>
               <a:t>Rich dataset (3000 trials) suitable for Human ID modeling.</a:t>
             </a:r>
           </a:p>
